--- a/OceanEmbed_SIH26066.pptx
+++ b/OceanEmbed_SIH26066.pptx
@@ -1850,7 +1850,7 @@
           <a:p>
             <a:r>
               <a:rPr lang="en-US" dirty="0"/>
-              <a:t>0.9078 degC RMSE, mean per-depth correlation 0.8812, bias +0.1003 degC, skill 0.2595 against climatology RMSE of 1.2259. The Murphy skill (1 - MSE/MSE_clim) is 0.4517 - we quote only the conservative RMSE-ratio figure, never both together. These are the SHIPPED satellite-input run; an earlier draft of this note quoted the GLORYS-fed comparator (0.8645) by mistake, which is the one number we must never present as ours.</a:t>
+              <a:t>0.9006 degC RMSE, mean per-depth correlation 0.8809, bias +0.1066 degC, skill 0.2400 against climatology RMSE of 1.1850. Where the cell has a real per-cell climatology (895 of 962 profiles) the skill is 0.1494; the other 67 sit on a basin-mean fill. The Murphy skill (1 - MSE/MSE_clim) is 0.4225 - we quote only the conservative RMSE-ratio figure, never both together. Scoring protocol seafloor_masked_v1 (2026-09-07): 93 comparisons below the training target's seafloor and one land-cell profile are declined and counted; under the earlier unmasked_v1 protocol the same checkpoint read 0.9078 and 0.2595 on 12,829 comparisons. These are the SHIPPED satellite-input run; an earlier draft of this note quoted the GLORYS-fed comparator by mistake.</a:t>
             </a:r>
             <a:endParaRPr lang="en-US" dirty="0"/>
           </a:p>
@@ -2026,7 +2026,7 @@
           <a:p>
             <a:r>
               <a:rPr lang="en-US" dirty="0"/>
-              <a:t>Calibration ratios at 5-10 m are 1.18-1.27 with 1-sigma coverage 0.57 against a 0.683 target. MC-dropout was 1.56-3.54 across all depths, which is much worse. These are the shipped satellite run; an earlier draft quoted the GLORYS-fed comparator's 1.32-1.37.</a:t>
+              <a:t>Calibration ratios at 5-10 m are 1.17-1.27 with 1-sigma coverage 0.57 against a 0.683 target. MC-dropout was 1.56-3.54 across all depths, which is much worse. These are the shipped satellite run; an earlier draft quoted the GLORYS-fed comparator's 1.32-1.37.</a:t>
             </a:r>
             <a:endParaRPr lang="en-US" dirty="0"/>
           </a:p>
@@ -5274,7 +5274,7 @@
                 <a:ea typeface="Cambria" pitchFamily="34" charset="-122"/>
                 <a:cs typeface="Cambria" pitchFamily="34" charset="-120"/>
               </a:rPr>
-              <a:t>0.91 °C</a:t>
+              <a:t>0.90 °C</a:t>
             </a:r>
             <a:endParaRPr lang="en-US" sz="2100" dirty="0"/>
           </a:p>
@@ -10470,7 +10470,7 @@
                 <a:ea typeface="Calibri" pitchFamily="34" charset="-122"/>
                 <a:cs typeface="Calibri" pitchFamily="34" charset="-120"/>
               </a:rPr>
-              <a:t>Scored against 962 real Argo float profiles the model has never seen — 12,829 comparisons, matched within 5 days of the test window.</a:t>
+              <a:t>Scored against 962 real Argo float profiles the model has never seen — 12,736 comparisons, matched within 5 days of the test window.</a:t>
             </a:r>
             <a:endParaRPr lang="en-US" sz="1500" dirty="0"/>
           </a:p>
@@ -10543,7 +10543,7 @@
                 <a:ea typeface="Cambria" pitchFamily="34" charset="-122"/>
                 <a:cs typeface="Cambria" pitchFamily="34" charset="-120"/>
               </a:rPr>
-              <a:t>0.91</a:t>
+              <a:t>0.90</a:t>
             </a:r>
             <a:pPr indent="0" marL="0">
               <a:buNone/>
@@ -10874,7 +10874,7 @@
                 <a:ea typeface="Cambria" pitchFamily="34" charset="-122"/>
                 <a:cs typeface="Cambria" pitchFamily="34" charset="-120"/>
               </a:rPr>
-              <a:t>+0.10</a:t>
+              <a:t>+0.11</a:t>
             </a:r>
             <a:pPr indent="0" marL="0">
               <a:buNone/>
@@ -11045,7 +11045,7 @@
                 <a:ea typeface="Cambria" pitchFamily="34" charset="-122"/>
                 <a:cs typeface="Cambria" pitchFamily="34" charset="-120"/>
               </a:rPr>
-              <a:t>26%</a:t>
+              <a:t>24%</a:t>
             </a:r>
             <a:pPr indent="0" marL="0">
               <a:buNone/>
@@ -11739,7 +11739,7 @@
                 <a:ea typeface="Calibri" pitchFamily="34" charset="-122"/>
                 <a:cs typeface="Calibri" pitchFamily="34" charset="-120"/>
               </a:rPr>
-              <a:t>The teal bar is shorter than the grey bar at 14 of the 15 depths. At 1000 m the seasonal average wins by 0.012 °C, and the chart labels it.</a:t>
+              <a:t>The teal bar is shorter than the grey bar at 14 of the 15 depths. At 1000 m the seasonal average wins by 0.055 °C, and the chart labels it.</a:t>
             </a:r>
             <a:endParaRPr lang="en-US" sz="1150" dirty="0"/>
           </a:p>

--- a/OceanEmbed_SIH26066.pptx
+++ b/OceanEmbed_SIH26066.pptx
@@ -1850,7 +1850,7 @@
           <a:p>
             <a:r>
               <a:rPr lang="en-US" dirty="0"/>
-              <a:t>0.9006 degC RMSE, mean per-depth correlation 0.8809, bias +0.1066 degC, skill 0.2400 against climatology RMSE of 1.1850. Where the cell has a real per-cell climatology (895 of 962 profiles) the skill is 0.1494; the other 67 sit on a basin-mean fill. The Murphy skill (1 - MSE/MSE_clim) is 0.4225 - we quote only the conservative RMSE-ratio figure, never both together. Scoring protocol seafloor_masked_v1 (2026-09-07): 93 comparisons below the training target's seafloor and one land-cell profile are declined and counted; under the earlier unmasked_v1 protocol the same checkpoint read 0.9078 and 0.2595 on 12,829 comparisons. These are the SHIPPED satellite-input run; an earlier draft of this note quoted the GLORYS-fed comparator by mistake.</a:t>
+              <a:t>0.9006 degC RMSE, mean per-depth correlation 0.8809, bias +0.1066 degC, skill 0.2400 against climatology RMSE of 1.1850. Where the cell has a real per-cell climatology (895 of 962 profiles) the skill is 0.1494; the other 67 sit on a basin-mean fill. The Murphy skill (1 - MSE/MSE_clim) is 0.4225 - we quote only the conservative RMSE-ratio figure, never both together. Scoring protocol seafloor_masked_v1 (2026-09-07): 93 comparisons below the training target's seafloor and one land-cell profile are declined and counted; under the earlier unmasked_v1 protocol the same checkpoint read 0.9078 and 0.2595 on 12,829 comparisons. These are the SHIPPED satellite-input run; an earlier draft of this note quoted the GLORYS-fed comparator by mistake. One limitation to state if asked, and to volunteer if the question is about validation: the EPOCH behind this checkpoint was chosen by lowest loss on the 2026-04-01 to 06-23 test block - the same days the Argo score is computed on - so model selection was not independent of the number. We found that in our own audit, fixed it in the code, and measured it: selecting instead on a validation block carved out of training costs +0.0824 degC across three seeds with the sign holding 3 of 3. We ship 0.9006 and state the dependency rather than quote a leak-free 0.98. PROJECT_RECORD section 16.6 has the full four-layout sweep.</a:t>
             </a:r>
             <a:endParaRPr lang="en-US" dirty="0"/>
           </a:p>

--- a/OceanEmbed_SIH26066.pptx
+++ b/OceanEmbed_SIH26066.pptx
@@ -1850,7 +1850,7 @@
           <a:p>
             <a:r>
               <a:rPr lang="en-US" dirty="0"/>
-              <a:t>0.9006 degC RMSE, mean per-depth correlation 0.8809, bias +0.1066 degC, skill 0.2400 against climatology RMSE of 1.1850. Where the cell has a real per-cell climatology (895 of 962 profiles) the skill is 0.1494; the other 67 sit on a basin-mean fill. The Murphy skill (1 - MSE/MSE_clim) is 0.4225 - we quote only the conservative RMSE-ratio figure, never both together. Scoring protocol seafloor_masked_v1 (2026-09-07): 93 comparisons below the training target's seafloor and one land-cell profile are declined and counted; under the earlier unmasked_v1 protocol the same checkpoint read 0.9078 and 0.2595 on 12,829 comparisons. These are the SHIPPED satellite-input run; an earlier draft of this note quoted the GLORYS-fed comparator by mistake. One limitation to state if asked, and to volunteer if the question is about validation: the EPOCH behind this checkpoint was chosen by lowest loss on the 2026-04-01 to 06-23 test block - the same days the Argo score is computed on - so model selection was not independent of the number. We found that in our own audit, fixed it in the code, and measured it: selecting instead on a validation block carved out of training costs +0.0824 degC across three seeds with the sign holding 3 of 3. We ship 0.9006 and state the dependency rather than quote a leak-free 0.98. PROJECT_RECORD section 16.6 has the full four-layout sweep.</a:t>
+              <a:t>0.9063 degC RMSE, mean per-depth correlation 0.8804, bias +0.1400 degC, skill 0.2379 against climatology RMSE of 1.1892. Where the cell has a real per-cell climatology (896 of 963 profiles) the skill is 0.1480; the other 67 sit on a basin-mean fill. The Murphy skill (1 - MSE/MSE_clim) is 0.4192 - we quote only the conservative RMSE-ratio figure, never both together. Scoring protocol seafloor_masked_v2 (2026-09-07): 92 comparisons below the training target's seafloor and one land-cell profile are declined and counted, and the Argo truth is interpolated on depth in metres - every earlier table had read the float's pressure in decibars as metres, sampling it about 1% too shallow. Under that older table the same checkpoint read 0.9006 (seafloor_masked_v1) and 0.9078 (unmasked_v1, on 12,829 comparisons). These are the SHIPPED satellite-input run; an earlier draft of this note quoted the GLORYS-fed comparator by mistake. One limitation to state if asked, and to volunteer if the question is about validation: the EPOCH behind this checkpoint was chosen by lowest loss on the 2026-04-01 to 06-23 test block - the same days the Argo score is computed on - so model selection was not independent of the number. We found that in our own audit, fixed it in the code, and measured it: selecting instead on a validation block carved out of training costs +0.0824 degC across three seeds with the sign holding 3 of 3. We ship 0.9006 and state the dependency rather than quote a leak-free 0.98. PROJECT_RECORD section 16.6 has the full four-layout sweep.</a:t>
             </a:r>
             <a:endParaRPr lang="en-US" dirty="0"/>
           </a:p>
@@ -5274,7 +5274,7 @@
                 <a:ea typeface="Cambria" pitchFamily="34" charset="-122"/>
                 <a:cs typeface="Cambria" pitchFamily="34" charset="-120"/>
               </a:rPr>
-              <a:t>0.90 °C</a:t>
+              <a:t>0.91 °C</a:t>
             </a:r>
             <a:endParaRPr lang="en-US" sz="2100" dirty="0"/>
           </a:p>
@@ -10470,7 +10470,7 @@
                 <a:ea typeface="Calibri" pitchFamily="34" charset="-122"/>
                 <a:cs typeface="Calibri" pitchFamily="34" charset="-120"/>
               </a:rPr>
-              <a:t>Scored against 962 real Argo float profiles the model has never seen — 12,736 comparisons, matched within 5 days of the test window.</a:t>
+              <a:t>Scored against 963 real Argo float profiles the model has never seen — 12,727 comparisons, matched within 5 days of the test window.</a:t>
             </a:r>
             <a:endParaRPr lang="en-US" sz="1500" dirty="0"/>
           </a:p>
@@ -10543,7 +10543,7 @@
                 <a:ea typeface="Cambria" pitchFamily="34" charset="-122"/>
                 <a:cs typeface="Cambria" pitchFamily="34" charset="-120"/>
               </a:rPr>
-              <a:t>0.90</a:t>
+              <a:t>0.91</a:t>
             </a:r>
             <a:pPr indent="0" marL="0">
               <a:buNone/>
@@ -10874,7 +10874,7 @@
                 <a:ea typeface="Cambria" pitchFamily="34" charset="-122"/>
                 <a:cs typeface="Cambria" pitchFamily="34" charset="-120"/>
               </a:rPr>
-              <a:t>+0.11</a:t>
+              <a:t>+0.14</a:t>
             </a:r>
             <a:pPr indent="0" marL="0">
               <a:buNone/>
@@ -11739,7 +11739,7 @@
                 <a:ea typeface="Calibri" pitchFamily="34" charset="-122"/>
                 <a:cs typeface="Calibri" pitchFamily="34" charset="-120"/>
               </a:rPr>
-              <a:t>The teal bar is shorter than the grey bar at 14 of the 15 depths. At 1000 m the seasonal average wins by 0.055 °C, and the chart labels it.</a:t>
+              <a:t>The teal bar is shorter than the grey bar at 14 of the 15 depths. At 1000 m the seasonal average wins by 0.024 °C, and the chart labels it.</a:t>
             </a:r>
             <a:endParaRPr lang="en-US" sz="1150" dirty="0"/>
           </a:p>
